--- a/public/attaches/PKHuang_Resume.pptx
+++ b/public/attaches/PKHuang_Resume.pptx
@@ -243,7 +243,7 @@
           <a:p>
             <a:fld id="{090B76F5-00DB-4EFF-A778-474511B35808}" type="datetimeFigureOut">
               <a:rPr lang="zh-TW" altLang="en-US" smtClean="0"/>
-              <a:t>2025/6/23</a:t>
+              <a:t>2026/4/16</a:t>
             </a:fld>
             <a:endParaRPr lang="zh-TW" altLang="en-US"/>
           </a:p>
@@ -413,7 +413,7 @@
           <a:p>
             <a:fld id="{090B76F5-00DB-4EFF-A778-474511B35808}" type="datetimeFigureOut">
               <a:rPr lang="zh-TW" altLang="en-US" smtClean="0"/>
-              <a:t>2025/6/23</a:t>
+              <a:t>2026/4/16</a:t>
             </a:fld>
             <a:endParaRPr lang="zh-TW" altLang="en-US"/>
           </a:p>
@@ -593,7 +593,7 @@
           <a:p>
             <a:fld id="{090B76F5-00DB-4EFF-A778-474511B35808}" type="datetimeFigureOut">
               <a:rPr lang="zh-TW" altLang="en-US" smtClean="0"/>
-              <a:t>2025/6/23</a:t>
+              <a:t>2026/4/16</a:t>
             </a:fld>
             <a:endParaRPr lang="zh-TW" altLang="en-US"/>
           </a:p>
@@ -763,7 +763,7 @@
           <a:p>
             <a:fld id="{090B76F5-00DB-4EFF-A778-474511B35808}" type="datetimeFigureOut">
               <a:rPr lang="zh-TW" altLang="en-US" smtClean="0"/>
-              <a:t>2025/6/23</a:t>
+              <a:t>2026/4/16</a:t>
             </a:fld>
             <a:endParaRPr lang="zh-TW" altLang="en-US"/>
           </a:p>
@@ -1007,7 +1007,7 @@
           <a:p>
             <a:fld id="{090B76F5-00DB-4EFF-A778-474511B35808}" type="datetimeFigureOut">
               <a:rPr lang="zh-TW" altLang="en-US" smtClean="0"/>
-              <a:t>2025/6/23</a:t>
+              <a:t>2026/4/16</a:t>
             </a:fld>
             <a:endParaRPr lang="zh-TW" altLang="en-US"/>
           </a:p>
@@ -1239,7 +1239,7 @@
           <a:p>
             <a:fld id="{090B76F5-00DB-4EFF-A778-474511B35808}" type="datetimeFigureOut">
               <a:rPr lang="zh-TW" altLang="en-US" smtClean="0"/>
-              <a:t>2025/6/23</a:t>
+              <a:t>2026/4/16</a:t>
             </a:fld>
             <a:endParaRPr lang="zh-TW" altLang="en-US"/>
           </a:p>
@@ -1606,7 +1606,7 @@
           <a:p>
             <a:fld id="{090B76F5-00DB-4EFF-A778-474511B35808}" type="datetimeFigureOut">
               <a:rPr lang="zh-TW" altLang="en-US" smtClean="0"/>
-              <a:t>2025/6/23</a:t>
+              <a:t>2026/4/16</a:t>
             </a:fld>
             <a:endParaRPr lang="zh-TW" altLang="en-US"/>
           </a:p>
@@ -1724,7 +1724,7 @@
           <a:p>
             <a:fld id="{090B76F5-00DB-4EFF-A778-474511B35808}" type="datetimeFigureOut">
               <a:rPr lang="zh-TW" altLang="en-US" smtClean="0"/>
-              <a:t>2025/6/23</a:t>
+              <a:t>2026/4/16</a:t>
             </a:fld>
             <a:endParaRPr lang="zh-TW" altLang="en-US"/>
           </a:p>
@@ -1819,7 +1819,7 @@
           <a:p>
             <a:fld id="{090B76F5-00DB-4EFF-A778-474511B35808}" type="datetimeFigureOut">
               <a:rPr lang="zh-TW" altLang="en-US" smtClean="0"/>
-              <a:t>2025/6/23</a:t>
+              <a:t>2026/4/16</a:t>
             </a:fld>
             <a:endParaRPr lang="zh-TW" altLang="en-US"/>
           </a:p>
@@ -2096,7 +2096,7 @@
           <a:p>
             <a:fld id="{090B76F5-00DB-4EFF-A778-474511B35808}" type="datetimeFigureOut">
               <a:rPr lang="zh-TW" altLang="en-US" smtClean="0"/>
-              <a:t>2025/6/23</a:t>
+              <a:t>2026/4/16</a:t>
             </a:fld>
             <a:endParaRPr lang="zh-TW" altLang="en-US"/>
           </a:p>
@@ -2353,7 +2353,7 @@
           <a:p>
             <a:fld id="{090B76F5-00DB-4EFF-A778-474511B35808}" type="datetimeFigureOut">
               <a:rPr lang="zh-TW" altLang="en-US" smtClean="0"/>
-              <a:t>2025/6/23</a:t>
+              <a:t>2026/4/16</a:t>
             </a:fld>
             <a:endParaRPr lang="zh-TW" altLang="en-US"/>
           </a:p>
@@ -2566,7 +2566,7 @@
           <a:p>
             <a:fld id="{090B76F5-00DB-4EFF-A778-474511B35808}" type="datetimeFigureOut">
               <a:rPr lang="zh-TW" altLang="en-US" smtClean="0"/>
-              <a:t>2025/6/23</a:t>
+              <a:t>2026/4/16</a:t>
             </a:fld>
             <a:endParaRPr lang="zh-TW" altLang="en-US"/>
           </a:p>
@@ -2979,8 +2979,8 @@
         </p:nvCxnSpPr>
         <p:spPr>
           <a:xfrm>
-            <a:off x="391081" y="2360528"/>
-            <a:ext cx="0" cy="7117990"/>
+            <a:off x="391081" y="2035676"/>
+            <a:ext cx="0" cy="7613149"/>
           </a:xfrm>
           <a:prstGeom prst="line">
             <a:avLst/>
@@ -3017,7 +3017,7 @@
         </p:nvSpPr>
         <p:spPr>
           <a:xfrm>
-            <a:off x="730644" y="2191251"/>
+            <a:off x="730644" y="1866399"/>
             <a:ext cx="3265638" cy="338554"/>
           </a:xfrm>
           <a:prstGeom prst="rect">
@@ -3064,7 +3064,7 @@
         </p:nvSpPr>
         <p:spPr>
           <a:xfrm>
-            <a:off x="730644" y="2557423"/>
+            <a:off x="730644" y="2232571"/>
             <a:ext cx="5802504" cy="1600438"/>
           </a:xfrm>
           <a:prstGeom prst="rect">
@@ -3088,7 +3088,84 @@
                   </a:schemeClr>
                 </a:solidFill>
               </a:rPr>
-              <a:t>Experienced engineer with 1 year in design verification and 3.5 years in firmware development. Skilled in collaborating with clients to define test plans and design test vectors, and experienced in working closely with in-house designers for efficient debugging. Familiar with FPV and using SVA to verify submodule behaviors. Highly self-motivated, dedicating personal time to mastering UVM library internals and building UVM VIPs to strengthen practical and theoretical understanding.</a:t>
+              <a:t>Experienced engineer </a:t>
+            </a:r>
+            <a:r>
+              <a:rPr lang="en-US" altLang="zh-TW" sz="1400" dirty="0" smtClean="0">
+                <a:solidFill>
+                  <a:schemeClr val="tx1">
+                    <a:lumMod val="85000"/>
+                    <a:lumOff val="15000"/>
+                  </a:schemeClr>
+                </a:solidFill>
+              </a:rPr>
+              <a:t>with </a:t>
+            </a:r>
+            <a:r>
+              <a:rPr lang="en-US" altLang="zh-TW" sz="1400" dirty="0">
+                <a:solidFill>
+                  <a:schemeClr val="tx1">
+                    <a:lumMod val="85000"/>
+                    <a:lumOff val="15000"/>
+                  </a:schemeClr>
+                </a:solidFill>
+              </a:rPr>
+              <a:t>≈2 years </a:t>
+            </a:r>
+            <a:r>
+              <a:rPr lang="en-US" altLang="zh-TW" sz="1400" dirty="0">
+                <a:solidFill>
+                  <a:schemeClr val="tx1">
+                    <a:lumMod val="85000"/>
+                    <a:lumOff val="15000"/>
+                  </a:schemeClr>
+                </a:solidFill>
+              </a:rPr>
+              <a:t>in </a:t>
+            </a:r>
+            <a:r>
+              <a:rPr lang="en-US" altLang="zh-TW" sz="1400" b="1" dirty="0">
+                <a:solidFill>
+                  <a:schemeClr val="tx1">
+                    <a:lumMod val="85000"/>
+                    <a:lumOff val="15000"/>
+                  </a:schemeClr>
+                </a:solidFill>
+              </a:rPr>
+              <a:t>design verification</a:t>
+            </a:r>
+            <a:r>
+              <a:rPr lang="en-US" altLang="zh-TW" sz="1400" dirty="0">
+                <a:solidFill>
+                  <a:schemeClr val="tx1">
+                    <a:lumMod val="85000"/>
+                    <a:lumOff val="15000"/>
+                  </a:schemeClr>
+                </a:solidFill>
+              </a:rPr>
+              <a:t> and 3.5 years in </a:t>
+            </a:r>
+            <a:r>
+              <a:rPr lang="en-US" altLang="zh-TW" sz="1400" b="1" dirty="0">
+                <a:solidFill>
+                  <a:schemeClr val="tx1">
+                    <a:lumMod val="85000"/>
+                    <a:lumOff val="15000"/>
+                  </a:schemeClr>
+                </a:solidFill>
+              </a:rPr>
+              <a:t>firmware development</a:t>
+            </a:r>
+            <a:r>
+              <a:rPr lang="en-US" altLang="zh-TW" sz="1400" dirty="0">
+                <a:solidFill>
+                  <a:schemeClr val="tx1">
+                    <a:lumMod val="85000"/>
+                    <a:lumOff val="15000"/>
+                  </a:schemeClr>
+                </a:solidFill>
+              </a:rPr>
+              <a:t>. Skilled in collaborating with clients to define test plans and design test vectors, and experienced in working closely with in-house designers for efficient debugging. Familiar with FPV and using SVA to verify submodule behaviors. Proficient in establishing UVM architectures and integrating VIP into the UVM framework, applying the overall structure to in-house DUTs for detailed and comprehensive verification.</a:t>
             </a:r>
             <a:endParaRPr lang="zh-TW" altLang="en-US" sz="1100" dirty="0">
               <a:solidFill>
@@ -3109,7 +3186,7 @@
         </p:nvSpPr>
         <p:spPr>
           <a:xfrm>
-            <a:off x="541820" y="1584047"/>
+            <a:off x="541820" y="1367476"/>
             <a:ext cx="3237168" cy="369332"/>
           </a:xfrm>
           <a:prstGeom prst="rect">
@@ -3157,7 +3234,7 @@
         </p:nvSpPr>
         <p:spPr>
           <a:xfrm>
-            <a:off x="730643" y="4327138"/>
+            <a:off x="760845" y="3888648"/>
             <a:ext cx="1844114" cy="338554"/>
           </a:xfrm>
           <a:prstGeom prst="rect">
@@ -3198,498 +3275,13 @@
       </p:sp>
       <p:sp>
         <p:nvSpPr>
-          <p:cNvPr id="24" name="文字方塊 23"/>
-          <p:cNvSpPr txBox="1"/>
-          <p:nvPr/>
-        </p:nvSpPr>
-        <p:spPr>
-          <a:xfrm>
-            <a:off x="730643" y="4665692"/>
-            <a:ext cx="4081988" cy="338554"/>
-          </a:xfrm>
-          <a:prstGeom prst="rect">
-            <a:avLst/>
-          </a:prstGeom>
-          <a:noFill/>
-        </p:spPr>
-        <p:txBody>
-          <a:bodyPr wrap="square" rtlCol="0">
-            <a:spAutoFit/>
-          </a:bodyPr>
-          <a:lstStyle/>
-          <a:p>
-            <a:r>
-              <a:rPr lang="en-US" altLang="zh-TW" sz="1600" b="1" dirty="0" smtClean="0">
-                <a:solidFill>
-                  <a:schemeClr val="tx1">
-                    <a:lumMod val="85000"/>
-                    <a:lumOff val="15000"/>
-                  </a:schemeClr>
-                </a:solidFill>
-              </a:rPr>
-              <a:t>Design Verification Engineer</a:t>
-            </a:r>
-            <a:r>
-              <a:rPr lang="en-US" altLang="zh-TW" sz="1400" b="1" dirty="0" smtClean="0">
-                <a:solidFill>
-                  <a:schemeClr val="tx1">
-                    <a:lumMod val="85000"/>
-                    <a:lumOff val="15000"/>
-                  </a:schemeClr>
-                </a:solidFill>
-              </a:rPr>
-              <a:t>  </a:t>
-            </a:r>
-            <a:r>
-              <a:rPr lang="en-US" altLang="zh-TW" sz="1400" dirty="0" smtClean="0">
-                <a:solidFill>
-                  <a:schemeClr val="tx1">
-                    <a:lumMod val="85000"/>
-                    <a:lumOff val="15000"/>
-                  </a:schemeClr>
-                </a:solidFill>
-              </a:rPr>
-              <a:t>|  </a:t>
-            </a:r>
-            <a:r>
-              <a:rPr lang="en-US" altLang="zh-TW" sz="1400" dirty="0" err="1" smtClean="0">
-                <a:solidFill>
-                  <a:schemeClr val="tx1">
-                    <a:lumMod val="85000"/>
-                    <a:lumOff val="15000"/>
-                  </a:schemeClr>
-                </a:solidFill>
-              </a:rPr>
-              <a:t>Phison</a:t>
-            </a:r>
-            <a:r>
-              <a:rPr lang="en-US" altLang="zh-TW" sz="1400" dirty="0" smtClean="0">
-                <a:solidFill>
-                  <a:schemeClr val="tx1">
-                    <a:lumMod val="85000"/>
-                    <a:lumOff val="15000"/>
-                  </a:schemeClr>
-                </a:solidFill>
-              </a:rPr>
-              <a:t> Electronic</a:t>
-            </a:r>
-            <a:endParaRPr lang="en-US" altLang="zh-TW" sz="1400" dirty="0">
-              <a:solidFill>
-                <a:schemeClr val="tx1">
-                  <a:lumMod val="85000"/>
-                  <a:lumOff val="15000"/>
-                </a:schemeClr>
-              </a:solidFill>
-            </a:endParaRPr>
-          </a:p>
-        </p:txBody>
-      </p:sp>
-      <p:sp>
-        <p:nvSpPr>
-          <p:cNvPr id="25" name="文字方塊 24"/>
-          <p:cNvSpPr txBox="1"/>
-          <p:nvPr/>
-        </p:nvSpPr>
-        <p:spPr>
-          <a:xfrm>
-            <a:off x="745744" y="4973469"/>
-            <a:ext cx="5802504" cy="1384995"/>
-          </a:xfrm>
-          <a:prstGeom prst="rect">
-            <a:avLst/>
-          </a:prstGeom>
-          <a:noFill/>
-        </p:spPr>
-        <p:txBody>
-          <a:bodyPr wrap="square" rtlCol="0">
-            <a:spAutoFit/>
-          </a:bodyPr>
-          <a:lstStyle/>
-          <a:p>
-            <a:pPr marL="285750" indent="-285750" algn="just">
-              <a:buFont typeface="Arial" panose="020B0604020202020204" pitchFamily="34" charset="0"/>
-              <a:buChar char="•"/>
-            </a:pPr>
-            <a:r>
-              <a:rPr lang="en-US" altLang="zh-TW" sz="1400" dirty="0">
-                <a:solidFill>
-                  <a:schemeClr val="tx1">
-                    <a:lumMod val="85000"/>
-                    <a:lumOff val="15000"/>
-                  </a:schemeClr>
-                </a:solidFill>
-              </a:rPr>
-              <a:t>UFS underlying IP (</a:t>
-            </a:r>
-            <a:r>
-              <a:rPr lang="en-US" altLang="zh-TW" sz="1400" b="1" dirty="0" err="1">
-                <a:solidFill>
-                  <a:schemeClr val="tx1">
-                    <a:lumMod val="85000"/>
-                    <a:lumOff val="15000"/>
-                  </a:schemeClr>
-                </a:solidFill>
-                <a:hlinkClick r:id="rId2"/>
-              </a:rPr>
-              <a:t>Unipro</a:t>
-            </a:r>
-            <a:r>
-              <a:rPr lang="en-US" altLang="zh-TW" sz="1400" dirty="0">
-                <a:solidFill>
-                  <a:schemeClr val="tx1">
-                    <a:lumMod val="85000"/>
-                    <a:lumOff val="15000"/>
-                  </a:schemeClr>
-                </a:solidFill>
-              </a:rPr>
-              <a:t>) design verification</a:t>
-            </a:r>
-          </a:p>
-          <a:p>
-            <a:pPr marL="285750" indent="-285750" algn="just">
-              <a:buFont typeface="Arial" panose="020B0604020202020204" pitchFamily="34" charset="0"/>
-              <a:buChar char="•"/>
-            </a:pPr>
-            <a:r>
-              <a:rPr lang="en-US" altLang="zh-TW" sz="1400" dirty="0">
-                <a:solidFill>
-                  <a:schemeClr val="tx1">
-                    <a:lumMod val="85000"/>
-                    <a:lumOff val="15000"/>
-                  </a:schemeClr>
-                </a:solidFill>
-              </a:rPr>
-              <a:t>Develop UVM environment for DUT</a:t>
-            </a:r>
-          </a:p>
-          <a:p>
-            <a:pPr marL="285750" indent="-285750" algn="just">
-              <a:buFont typeface="Arial" panose="020B0604020202020204" pitchFamily="34" charset="0"/>
-              <a:buChar char="•"/>
-            </a:pPr>
-            <a:r>
-              <a:rPr lang="en-US" altLang="zh-TW" sz="1400" dirty="0">
-                <a:solidFill>
-                  <a:schemeClr val="tx1">
-                    <a:lumMod val="85000"/>
-                    <a:lumOff val="15000"/>
-                  </a:schemeClr>
-                </a:solidFill>
-              </a:rPr>
-              <a:t>Formal Property Verification (</a:t>
-            </a:r>
-            <a:r>
-              <a:rPr lang="en-US" altLang="zh-TW" sz="1400" b="1" dirty="0">
-                <a:solidFill>
-                  <a:schemeClr val="tx1">
-                    <a:lumMod val="85000"/>
-                    <a:lumOff val="15000"/>
-                  </a:schemeClr>
-                </a:solidFill>
-              </a:rPr>
-              <a:t>FPV</a:t>
-            </a:r>
-            <a:r>
-              <a:rPr lang="en-US" altLang="zh-TW" sz="1400" dirty="0">
-                <a:solidFill>
-                  <a:schemeClr val="tx1">
-                    <a:lumMod val="85000"/>
-                    <a:lumOff val="15000"/>
-                  </a:schemeClr>
-                </a:solidFill>
-              </a:rPr>
-              <a:t>)</a:t>
-            </a:r>
-          </a:p>
-          <a:p>
-            <a:pPr marL="285750" indent="-285750" algn="just">
-              <a:buFont typeface="Arial" panose="020B0604020202020204" pitchFamily="34" charset="0"/>
-              <a:buChar char="•"/>
-            </a:pPr>
-            <a:r>
-              <a:rPr lang="en-US" altLang="zh-TW" sz="1400" dirty="0">
-                <a:solidFill>
-                  <a:schemeClr val="tx1">
-                    <a:lumMod val="85000"/>
-                    <a:lumOff val="15000"/>
-                  </a:schemeClr>
-                </a:solidFill>
-              </a:rPr>
-              <a:t>Design test plans and </a:t>
-            </a:r>
-            <a:r>
-              <a:rPr lang="en-US" altLang="zh-TW" sz="1400" dirty="0" err="1" smtClean="0">
-                <a:solidFill>
-                  <a:schemeClr val="tx1">
-                    <a:lumMod val="85000"/>
-                    <a:lumOff val="15000"/>
-                  </a:schemeClr>
-                </a:solidFill>
-              </a:rPr>
-              <a:t>testvectors</a:t>
-            </a:r>
-            <a:endParaRPr lang="en-US" altLang="zh-TW" sz="1400" dirty="0" smtClean="0">
-              <a:solidFill>
-                <a:schemeClr val="tx1">
-                  <a:lumMod val="85000"/>
-                  <a:lumOff val="15000"/>
-                </a:schemeClr>
-              </a:solidFill>
-            </a:endParaRPr>
-          </a:p>
-          <a:p>
-            <a:pPr marL="285750" indent="-285750" algn="just">
-              <a:buFont typeface="Arial" panose="020B0604020202020204" pitchFamily="34" charset="0"/>
-              <a:buChar char="•"/>
-            </a:pPr>
-            <a:r>
-              <a:rPr lang="en-US" altLang="zh-TW" sz="1400" dirty="0" smtClean="0">
-                <a:solidFill>
-                  <a:schemeClr val="tx1">
-                    <a:lumMod val="85000"/>
-                    <a:lumOff val="15000"/>
-                  </a:schemeClr>
-                </a:solidFill>
-              </a:rPr>
-              <a:t>Discuss </a:t>
-            </a:r>
-            <a:r>
-              <a:rPr lang="en-US" altLang="zh-TW" sz="1400" dirty="0">
-                <a:solidFill>
-                  <a:schemeClr val="tx1">
-                    <a:lumMod val="85000"/>
-                    <a:lumOff val="15000"/>
-                  </a:schemeClr>
-                </a:solidFill>
-              </a:rPr>
-              <a:t>and modify test plans with international clients</a:t>
-            </a:r>
-          </a:p>
-          <a:p>
-            <a:pPr marL="285750" indent="-285750" algn="just">
-              <a:buFont typeface="Arial" panose="020B0604020202020204" pitchFamily="34" charset="0"/>
-              <a:buChar char="•"/>
-            </a:pPr>
-            <a:r>
-              <a:rPr lang="en-US" altLang="zh-TW" sz="1400" dirty="0">
-                <a:solidFill>
-                  <a:schemeClr val="tx1">
-                    <a:lumMod val="85000"/>
-                    <a:lumOff val="15000"/>
-                  </a:schemeClr>
-                </a:solidFill>
-              </a:rPr>
-              <a:t>Verifying in-house DUTs and collaborating with designers on debugging</a:t>
-            </a:r>
-          </a:p>
-        </p:txBody>
-      </p:sp>
-      <p:sp>
-        <p:nvSpPr>
-          <p:cNvPr id="26" name="文字方塊 25"/>
-          <p:cNvSpPr txBox="1"/>
-          <p:nvPr/>
-        </p:nvSpPr>
-        <p:spPr>
-          <a:xfrm>
-            <a:off x="745744" y="6442671"/>
-            <a:ext cx="3222066" cy="338554"/>
-          </a:xfrm>
-          <a:prstGeom prst="rect">
-            <a:avLst/>
-          </a:prstGeom>
-          <a:noFill/>
-        </p:spPr>
-        <p:txBody>
-          <a:bodyPr wrap="square" rtlCol="0">
-            <a:spAutoFit/>
-          </a:bodyPr>
-          <a:lstStyle/>
-          <a:p>
-            <a:r>
-              <a:rPr lang="en-US" altLang="zh-TW" sz="1600" b="1" dirty="0" smtClean="0">
-                <a:solidFill>
-                  <a:schemeClr val="tx1">
-                    <a:lumMod val="85000"/>
-                    <a:lumOff val="15000"/>
-                  </a:schemeClr>
-                </a:solidFill>
-              </a:rPr>
-              <a:t>Firmware Engineer</a:t>
-            </a:r>
-            <a:r>
-              <a:rPr lang="en-US" altLang="zh-TW" sz="1400" b="1" dirty="0" smtClean="0">
-                <a:solidFill>
-                  <a:schemeClr val="tx1">
-                    <a:lumMod val="85000"/>
-                    <a:lumOff val="15000"/>
-                  </a:schemeClr>
-                </a:solidFill>
-              </a:rPr>
-              <a:t>  </a:t>
-            </a:r>
-            <a:r>
-              <a:rPr lang="en-US" altLang="zh-TW" sz="1400" dirty="0" smtClean="0">
-                <a:solidFill>
-                  <a:schemeClr val="tx1">
-                    <a:lumMod val="85000"/>
-                    <a:lumOff val="15000"/>
-                  </a:schemeClr>
-                </a:solidFill>
-              </a:rPr>
-              <a:t>|  Silicon Motion</a:t>
-            </a:r>
-            <a:endParaRPr lang="en-US" altLang="zh-TW" sz="1400" dirty="0">
-              <a:solidFill>
-                <a:schemeClr val="tx1">
-                  <a:lumMod val="85000"/>
-                  <a:lumOff val="15000"/>
-                </a:schemeClr>
-              </a:solidFill>
-            </a:endParaRPr>
-          </a:p>
-        </p:txBody>
-      </p:sp>
-      <p:sp>
-        <p:nvSpPr>
-          <p:cNvPr id="28" name="文字方塊 27"/>
-          <p:cNvSpPr txBox="1"/>
-          <p:nvPr/>
-        </p:nvSpPr>
-        <p:spPr>
-          <a:xfrm>
-            <a:off x="760845" y="6750448"/>
-            <a:ext cx="5802504" cy="1169551"/>
-          </a:xfrm>
-          <a:prstGeom prst="rect">
-            <a:avLst/>
-          </a:prstGeom>
-          <a:noFill/>
-        </p:spPr>
-        <p:txBody>
-          <a:bodyPr wrap="square" rtlCol="0">
-            <a:spAutoFit/>
-          </a:bodyPr>
-          <a:lstStyle/>
-          <a:p>
-            <a:pPr marL="285750" indent="-285750" algn="just">
-              <a:buFont typeface="Arial" panose="020B0604020202020204" pitchFamily="34" charset="0"/>
-              <a:buChar char="•"/>
-            </a:pPr>
-            <a:r>
-              <a:rPr lang="en-US" altLang="zh-TW" sz="1400" dirty="0">
-                <a:solidFill>
-                  <a:schemeClr val="tx1">
-                    <a:lumMod val="85000"/>
-                    <a:lumOff val="15000"/>
-                  </a:schemeClr>
-                </a:solidFill>
-              </a:rPr>
-              <a:t>Develop Security features according to </a:t>
-            </a:r>
-            <a:r>
-              <a:rPr lang="en-US" altLang="zh-TW" sz="1400" dirty="0">
-                <a:solidFill>
-                  <a:schemeClr val="tx1">
-                    <a:lumMod val="85000"/>
-                    <a:lumOff val="15000"/>
-                  </a:schemeClr>
-                </a:solidFill>
-                <a:hlinkClick r:id="rId3"/>
-              </a:rPr>
-              <a:t>TCG</a:t>
-            </a:r>
-            <a:r>
-              <a:rPr lang="en-US" altLang="zh-TW" sz="1400" dirty="0">
-                <a:solidFill>
-                  <a:schemeClr val="tx1">
-                    <a:lumMod val="85000"/>
-                    <a:lumOff val="15000"/>
-                  </a:schemeClr>
-                </a:solidFill>
-              </a:rPr>
-              <a:t> specification</a:t>
-            </a:r>
-          </a:p>
-          <a:p>
-            <a:pPr marL="285750" indent="-285750" algn="just">
-              <a:buFont typeface="Arial" panose="020B0604020202020204" pitchFamily="34" charset="0"/>
-              <a:buChar char="•"/>
-            </a:pPr>
-            <a:r>
-              <a:rPr lang="en-US" altLang="zh-TW" sz="1400" dirty="0">
-                <a:solidFill>
-                  <a:schemeClr val="tx1">
-                    <a:lumMod val="85000"/>
-                    <a:lumOff val="15000"/>
-                  </a:schemeClr>
-                </a:solidFill>
-              </a:rPr>
-              <a:t>Design Security features Test Plan &amp; verify</a:t>
-            </a:r>
-          </a:p>
-          <a:p>
-            <a:pPr marL="285750" indent="-285750" algn="just">
-              <a:buFont typeface="Arial" panose="020B0604020202020204" pitchFamily="34" charset="0"/>
-              <a:buChar char="•"/>
-            </a:pPr>
-            <a:r>
-              <a:rPr lang="en-US" altLang="zh-TW" sz="1400" dirty="0">
-                <a:solidFill>
-                  <a:schemeClr val="tx1">
-                    <a:lumMod val="85000"/>
-                    <a:lumOff val="15000"/>
-                  </a:schemeClr>
-                </a:solidFill>
-              </a:rPr>
-              <a:t>Customize requirements &amp; Firmware debug</a:t>
-            </a:r>
-          </a:p>
-          <a:p>
-            <a:pPr marL="285750" indent="-285750" algn="just">
-              <a:buFont typeface="Arial" panose="020B0604020202020204" pitchFamily="34" charset="0"/>
-              <a:buChar char="•"/>
-            </a:pPr>
-            <a:r>
-              <a:rPr lang="en-US" altLang="zh-TW" sz="1400" dirty="0">
-                <a:solidFill>
-                  <a:schemeClr val="tx1">
-                    <a:lumMod val="85000"/>
-                    <a:lumOff val="15000"/>
-                  </a:schemeClr>
-                </a:solidFill>
-              </a:rPr>
-              <a:t>Modularize features into Libraries for easier project management</a:t>
-            </a:r>
-          </a:p>
-          <a:p>
-            <a:pPr marL="285750" indent="-285750" algn="just">
-              <a:buFont typeface="Arial" panose="020B0604020202020204" pitchFamily="34" charset="0"/>
-              <a:buChar char="•"/>
-            </a:pPr>
-            <a:r>
-              <a:rPr lang="en-US" altLang="zh-TW" sz="1400" dirty="0">
-                <a:solidFill>
-                  <a:schemeClr val="tx1">
-                    <a:lumMod val="85000"/>
-                    <a:lumOff val="15000"/>
-                  </a:schemeClr>
-                </a:solidFill>
-              </a:rPr>
-              <a:t>Develop automation scripts to improve working efficiency</a:t>
-            </a:r>
-          </a:p>
-        </p:txBody>
-      </p:sp>
-      <p:sp>
-        <p:nvSpPr>
           <p:cNvPr id="29" name="文字方塊 28"/>
           <p:cNvSpPr txBox="1"/>
           <p:nvPr/>
         </p:nvSpPr>
         <p:spPr>
           <a:xfrm>
-            <a:off x="730643" y="8048651"/>
+            <a:off x="730642" y="8286776"/>
             <a:ext cx="1844114" cy="338554"/>
           </a:xfrm>
           <a:prstGeom prst="rect">
@@ -3736,7 +3328,7 @@
         </p:nvSpPr>
         <p:spPr>
           <a:xfrm>
-            <a:off x="760846" y="8387205"/>
+            <a:off x="760845" y="8625330"/>
             <a:ext cx="5802504" cy="338554"/>
           </a:xfrm>
           <a:prstGeom prst="rect">
@@ -3813,7 +3405,7 @@
         </p:nvSpPr>
         <p:spPr>
           <a:xfrm>
-            <a:off x="760846" y="8609696"/>
+            <a:off x="760845" y="8847821"/>
             <a:ext cx="5802504" cy="307777"/>
           </a:xfrm>
           <a:prstGeom prst="rect">
@@ -3868,7 +3460,7 @@
         </p:nvSpPr>
         <p:spPr>
           <a:xfrm>
-            <a:off x="760846" y="8948250"/>
+            <a:off x="760845" y="9186375"/>
             <a:ext cx="5802504" cy="338554"/>
           </a:xfrm>
           <a:prstGeom prst="rect">
@@ -3923,7 +3515,7 @@
         </p:nvSpPr>
         <p:spPr>
           <a:xfrm>
-            <a:off x="760846" y="9170741"/>
+            <a:off x="760845" y="9408866"/>
             <a:ext cx="5802504" cy="307777"/>
           </a:xfrm>
           <a:prstGeom prst="rect">
@@ -3978,7 +3570,7 @@
         </p:nvSpPr>
         <p:spPr>
           <a:xfrm>
-            <a:off x="5158265" y="8351109"/>
+            <a:off x="5158264" y="8589234"/>
             <a:ext cx="1591451" cy="307777"/>
           </a:xfrm>
           <a:prstGeom prst="rect">
@@ -4022,7 +3614,7 @@
         </p:nvSpPr>
         <p:spPr>
           <a:xfrm>
-            <a:off x="5158265" y="8942931"/>
+            <a:off x="5158264" y="9181056"/>
             <a:ext cx="1591451" cy="307777"/>
           </a:xfrm>
           <a:prstGeom prst="rect">
@@ -4066,7 +3658,7 @@
         </p:nvSpPr>
         <p:spPr>
           <a:xfrm>
-            <a:off x="338718" y="2308165"/>
+            <a:off x="338718" y="1983313"/>
             <a:ext cx="104726" cy="104726"/>
           </a:xfrm>
           <a:prstGeom prst="ellipse">
@@ -4121,7 +3713,7 @@
         </p:nvSpPr>
         <p:spPr>
           <a:xfrm>
-            <a:off x="338718" y="4497912"/>
+            <a:off x="338718" y="4105482"/>
             <a:ext cx="104726" cy="104726"/>
           </a:xfrm>
           <a:prstGeom prst="ellipse">
@@ -4176,7 +3768,7 @@
         </p:nvSpPr>
         <p:spPr>
           <a:xfrm>
-            <a:off x="338718" y="8005644"/>
+            <a:off x="338718" y="8405694"/>
             <a:ext cx="104726" cy="104726"/>
           </a:xfrm>
           <a:prstGeom prst="ellipse">
@@ -4223,78 +3815,653 @@
           </a:p>
         </p:txBody>
       </p:sp>
-      <p:sp>
-        <p:nvSpPr>
-          <p:cNvPr id="40" name="文字方塊 39"/>
-          <p:cNvSpPr txBox="1"/>
+      <p:grpSp>
+        <p:nvGrpSpPr>
+          <p:cNvPr id="5" name="群組 4"/>
+          <p:cNvGrpSpPr/>
           <p:nvPr/>
-        </p:nvSpPr>
-        <p:spPr>
+        </p:nvGrpSpPr>
+        <p:grpSpPr>
           <a:xfrm>
-            <a:off x="5158263" y="6458935"/>
-            <a:ext cx="1591451" cy="307777"/>
+            <a:off x="730643" y="6877306"/>
+            <a:ext cx="6003970" cy="1323440"/>
+            <a:chOff x="730643" y="6862066"/>
+            <a:chExt cx="6003970" cy="1323440"/>
           </a:xfrm>
-          <a:prstGeom prst="rect">
-            <a:avLst/>
-          </a:prstGeom>
-          <a:noFill/>
-        </p:spPr>
-        <p:txBody>
-          <a:bodyPr wrap="square" rtlCol="0">
-            <a:spAutoFit/>
-          </a:bodyPr>
-          <a:lstStyle/>
-          <a:p>
-            <a:r>
-              <a:rPr lang="en-US" altLang="zh-TW" sz="1400" dirty="0">
+        </p:grpSpPr>
+        <p:sp>
+          <p:nvSpPr>
+            <p:cNvPr id="26" name="文字方塊 25"/>
+            <p:cNvSpPr txBox="1"/>
+            <p:nvPr/>
+          </p:nvSpPr>
+          <p:spPr>
+            <a:xfrm>
+              <a:off x="730643" y="6862066"/>
+              <a:ext cx="3222066" cy="338554"/>
+            </a:xfrm>
+            <a:prstGeom prst="rect">
+              <a:avLst/>
+            </a:prstGeom>
+            <a:noFill/>
+          </p:spPr>
+          <p:txBody>
+            <a:bodyPr wrap="square" rtlCol="0">
+              <a:spAutoFit/>
+            </a:bodyPr>
+            <a:lstStyle/>
+            <a:p>
+              <a:r>
+                <a:rPr lang="en-US" altLang="zh-TW" sz="1600" b="1" dirty="0" smtClean="0">
+                  <a:solidFill>
+                    <a:schemeClr val="tx1">
+                      <a:lumMod val="85000"/>
+                      <a:lumOff val="15000"/>
+                    </a:schemeClr>
+                  </a:solidFill>
+                </a:rPr>
+                <a:t>Firmware Engineer</a:t>
+              </a:r>
+              <a:r>
+                <a:rPr lang="en-US" altLang="zh-TW" sz="1400" b="1" dirty="0" smtClean="0">
+                  <a:solidFill>
+                    <a:schemeClr val="tx1">
+                      <a:lumMod val="85000"/>
+                      <a:lumOff val="15000"/>
+                    </a:schemeClr>
+                  </a:solidFill>
+                </a:rPr>
+                <a:t>  </a:t>
+              </a:r>
+              <a:r>
+                <a:rPr lang="en-US" altLang="zh-TW" sz="1400" dirty="0" smtClean="0">
+                  <a:solidFill>
+                    <a:schemeClr val="tx1">
+                      <a:lumMod val="85000"/>
+                      <a:lumOff val="15000"/>
+                    </a:schemeClr>
+                  </a:solidFill>
+                </a:rPr>
+                <a:t>|  Silicon Motion</a:t>
+              </a:r>
+              <a:endParaRPr lang="en-US" altLang="zh-TW" sz="1400" dirty="0">
                 <a:solidFill>
                   <a:schemeClr val="tx1">
                     <a:lumMod val="85000"/>
                     <a:lumOff val="15000"/>
                   </a:schemeClr>
                 </a:solidFill>
-              </a:rPr>
-              <a:t>01/2021 – 05/2024</a:t>
-            </a:r>
-          </a:p>
-        </p:txBody>
-      </p:sp>
-      <p:sp>
-        <p:nvSpPr>
-          <p:cNvPr id="41" name="文字方塊 40"/>
-          <p:cNvSpPr txBox="1"/>
-          <p:nvPr/>
-        </p:nvSpPr>
-        <p:spPr>
-          <a:xfrm>
-            <a:off x="5152193" y="4681080"/>
-            <a:ext cx="1591451" cy="307777"/>
-          </a:xfrm>
-          <a:prstGeom prst="rect">
-            <a:avLst/>
-          </a:prstGeom>
-          <a:noFill/>
-        </p:spPr>
-        <p:txBody>
-          <a:bodyPr wrap="square" rtlCol="0">
-            <a:spAutoFit/>
-          </a:bodyPr>
-          <a:lstStyle/>
-          <a:p>
-            <a:r>
-              <a:rPr lang="en-US" altLang="zh-TW" sz="1400" dirty="0">
+              </a:endParaRPr>
+            </a:p>
+          </p:txBody>
+        </p:sp>
+        <p:sp>
+          <p:nvSpPr>
+            <p:cNvPr id="28" name="文字方塊 27"/>
+            <p:cNvSpPr txBox="1"/>
+            <p:nvPr/>
+          </p:nvSpPr>
+          <p:spPr>
+            <a:xfrm>
+              <a:off x="745744" y="7169843"/>
+              <a:ext cx="5802504" cy="1015663"/>
+            </a:xfrm>
+            <a:prstGeom prst="rect">
+              <a:avLst/>
+            </a:prstGeom>
+            <a:noFill/>
+          </p:spPr>
+          <p:txBody>
+            <a:bodyPr wrap="square" rtlCol="0">
+              <a:spAutoFit/>
+            </a:bodyPr>
+            <a:lstStyle/>
+            <a:p>
+              <a:pPr marL="285750" indent="-285750" algn="just">
+                <a:buFont typeface="Arial" panose="020B0604020202020204" pitchFamily="34" charset="0"/>
+                <a:buChar char="•"/>
+              </a:pPr>
+              <a:r>
+                <a:rPr lang="en-US" altLang="zh-TW" sz="1200" dirty="0">
+                  <a:solidFill>
+                    <a:schemeClr val="tx1">
+                      <a:lumMod val="85000"/>
+                      <a:lumOff val="15000"/>
+                    </a:schemeClr>
+                  </a:solidFill>
+                </a:rPr>
+                <a:t>Develop Security features according to </a:t>
+              </a:r>
+              <a:r>
+                <a:rPr lang="en-US" altLang="zh-TW" sz="1200" dirty="0">
+                  <a:solidFill>
+                    <a:schemeClr val="tx1">
+                      <a:lumMod val="85000"/>
+                      <a:lumOff val="15000"/>
+                    </a:schemeClr>
+                  </a:solidFill>
+                  <a:hlinkClick r:id="rId2"/>
+                </a:rPr>
+                <a:t>TCG</a:t>
+              </a:r>
+              <a:r>
+                <a:rPr lang="en-US" altLang="zh-TW" sz="1200" dirty="0">
+                  <a:solidFill>
+                    <a:schemeClr val="tx1">
+                      <a:lumMod val="85000"/>
+                      <a:lumOff val="15000"/>
+                    </a:schemeClr>
+                  </a:solidFill>
+                </a:rPr>
+                <a:t> specification</a:t>
+              </a:r>
+            </a:p>
+            <a:p>
+              <a:pPr marL="285750" indent="-285750" algn="just">
+                <a:buFont typeface="Arial" panose="020B0604020202020204" pitchFamily="34" charset="0"/>
+                <a:buChar char="•"/>
+              </a:pPr>
+              <a:r>
+                <a:rPr lang="en-US" altLang="zh-TW" sz="1200" dirty="0">
+                  <a:solidFill>
+                    <a:schemeClr val="tx1">
+                      <a:lumMod val="85000"/>
+                      <a:lumOff val="15000"/>
+                    </a:schemeClr>
+                  </a:solidFill>
+                </a:rPr>
+                <a:t>Design Security features </a:t>
+              </a:r>
+              <a:r>
+                <a:rPr lang="en-US" altLang="zh-TW" sz="1200" b="1" dirty="0">
+                  <a:solidFill>
+                    <a:schemeClr val="tx1">
+                      <a:lumMod val="85000"/>
+                      <a:lumOff val="15000"/>
+                    </a:schemeClr>
+                  </a:solidFill>
+                </a:rPr>
+                <a:t>Test Plan &amp; </a:t>
+              </a:r>
+              <a:r>
+                <a:rPr lang="en-US" altLang="zh-TW" sz="1200" b="1" dirty="0" smtClean="0">
+                  <a:solidFill>
+                    <a:schemeClr val="tx1">
+                      <a:lumMod val="85000"/>
+                      <a:lumOff val="15000"/>
+                    </a:schemeClr>
+                  </a:solidFill>
+                </a:rPr>
+                <a:t>firmware feature verification</a:t>
+              </a:r>
+              <a:endParaRPr lang="en-US" altLang="zh-TW" sz="1200" b="1" dirty="0">
                 <a:solidFill>
                   <a:schemeClr val="tx1">
                     <a:lumMod val="85000"/>
                     <a:lumOff val="15000"/>
                   </a:schemeClr>
                 </a:solidFill>
-              </a:rPr>
-              <a:t>06/2024 - Present</a:t>
-            </a:r>
-          </a:p>
-        </p:txBody>
-      </p:sp>
+              </a:endParaRPr>
+            </a:p>
+            <a:p>
+              <a:pPr marL="285750" indent="-285750" algn="just">
+                <a:buFont typeface="Arial" panose="020B0604020202020204" pitchFamily="34" charset="0"/>
+                <a:buChar char="•"/>
+              </a:pPr>
+              <a:r>
+                <a:rPr lang="en-US" altLang="zh-TW" sz="1200" dirty="0">
+                  <a:solidFill>
+                    <a:schemeClr val="tx1">
+                      <a:lumMod val="85000"/>
+                      <a:lumOff val="15000"/>
+                    </a:schemeClr>
+                  </a:solidFill>
+                </a:rPr>
+                <a:t>Customize requirements &amp; Firmware debug</a:t>
+              </a:r>
+            </a:p>
+            <a:p>
+              <a:pPr marL="285750" indent="-285750" algn="just">
+                <a:buFont typeface="Arial" panose="020B0604020202020204" pitchFamily="34" charset="0"/>
+                <a:buChar char="•"/>
+              </a:pPr>
+              <a:r>
+                <a:rPr lang="en-US" altLang="zh-TW" sz="1200" dirty="0">
+                  <a:solidFill>
+                    <a:schemeClr val="tx1">
+                      <a:lumMod val="85000"/>
+                      <a:lumOff val="15000"/>
+                    </a:schemeClr>
+                  </a:solidFill>
+                </a:rPr>
+                <a:t>Modularize features into Libraries for easier project management</a:t>
+              </a:r>
+            </a:p>
+            <a:p>
+              <a:pPr marL="285750" indent="-285750" algn="just">
+                <a:buFont typeface="Arial" panose="020B0604020202020204" pitchFamily="34" charset="0"/>
+                <a:buChar char="•"/>
+              </a:pPr>
+              <a:r>
+                <a:rPr lang="en-US" altLang="zh-TW" sz="1200" dirty="0">
+                  <a:solidFill>
+                    <a:schemeClr val="tx1">
+                      <a:lumMod val="85000"/>
+                      <a:lumOff val="15000"/>
+                    </a:schemeClr>
+                  </a:solidFill>
+                </a:rPr>
+                <a:t>Develop automation scripts to improve working efficiency</a:t>
+              </a:r>
+            </a:p>
+          </p:txBody>
+        </p:sp>
+        <p:sp>
+          <p:nvSpPr>
+            <p:cNvPr id="40" name="文字方塊 39"/>
+            <p:cNvSpPr txBox="1"/>
+            <p:nvPr/>
+          </p:nvSpPr>
+          <p:spPr>
+            <a:xfrm>
+              <a:off x="5143162" y="6878330"/>
+              <a:ext cx="1591451" cy="307777"/>
+            </a:xfrm>
+            <a:prstGeom prst="rect">
+              <a:avLst/>
+            </a:prstGeom>
+            <a:noFill/>
+          </p:spPr>
+          <p:txBody>
+            <a:bodyPr wrap="square" rtlCol="0">
+              <a:spAutoFit/>
+            </a:bodyPr>
+            <a:lstStyle/>
+            <a:p>
+              <a:r>
+                <a:rPr lang="en-US" altLang="zh-TW" sz="1400" dirty="0">
+                  <a:solidFill>
+                    <a:schemeClr val="tx1">
+                      <a:lumMod val="85000"/>
+                      <a:lumOff val="15000"/>
+                    </a:schemeClr>
+                  </a:solidFill>
+                </a:rPr>
+                <a:t>01/2021 – 05/2024</a:t>
+              </a:r>
+            </a:p>
+          </p:txBody>
+        </p:sp>
+      </p:grpSp>
+      <p:grpSp>
+        <p:nvGrpSpPr>
+          <p:cNvPr id="3" name="群組 2"/>
+          <p:cNvGrpSpPr/>
+          <p:nvPr/>
+        </p:nvGrpSpPr>
+        <p:grpSpPr>
+          <a:xfrm>
+            <a:off x="760845" y="5358200"/>
+            <a:ext cx="6013001" cy="1508106"/>
+            <a:chOff x="760845" y="5342960"/>
+            <a:chExt cx="6013001" cy="1508106"/>
+          </a:xfrm>
+        </p:grpSpPr>
+        <p:sp>
+          <p:nvSpPr>
+            <p:cNvPr id="24" name="文字方塊 23"/>
+            <p:cNvSpPr txBox="1"/>
+            <p:nvPr/>
+          </p:nvSpPr>
+          <p:spPr>
+            <a:xfrm>
+              <a:off x="760845" y="5342960"/>
+              <a:ext cx="4226154" cy="338554"/>
+            </a:xfrm>
+            <a:prstGeom prst="rect">
+              <a:avLst/>
+            </a:prstGeom>
+            <a:noFill/>
+          </p:spPr>
+          <p:txBody>
+            <a:bodyPr wrap="square" rtlCol="0">
+              <a:spAutoFit/>
+            </a:bodyPr>
+            <a:lstStyle/>
+            <a:p>
+              <a:r>
+                <a:rPr lang="en-US" altLang="zh-TW" sz="1600" b="1" dirty="0" smtClean="0">
+                  <a:solidFill>
+                    <a:schemeClr val="tx1">
+                      <a:lumMod val="85000"/>
+                      <a:lumOff val="15000"/>
+                    </a:schemeClr>
+                  </a:solidFill>
+                </a:rPr>
+                <a:t>Design Verification Engineer</a:t>
+              </a:r>
+              <a:r>
+                <a:rPr lang="en-US" altLang="zh-TW" sz="1400" b="1" dirty="0" smtClean="0">
+                  <a:solidFill>
+                    <a:schemeClr val="tx1">
+                      <a:lumMod val="85000"/>
+                      <a:lumOff val="15000"/>
+                    </a:schemeClr>
+                  </a:solidFill>
+                </a:rPr>
+                <a:t>  </a:t>
+              </a:r>
+              <a:r>
+                <a:rPr lang="en-US" altLang="zh-TW" sz="1400" dirty="0" smtClean="0">
+                  <a:solidFill>
+                    <a:schemeClr val="tx1">
+                      <a:lumMod val="85000"/>
+                      <a:lumOff val="15000"/>
+                    </a:schemeClr>
+                  </a:solidFill>
+                </a:rPr>
+                <a:t>|  </a:t>
+              </a:r>
+              <a:r>
+                <a:rPr lang="en-US" altLang="zh-TW" sz="1400" dirty="0" err="1" smtClean="0">
+                  <a:solidFill>
+                    <a:schemeClr val="tx1">
+                      <a:lumMod val="85000"/>
+                      <a:lumOff val="15000"/>
+                    </a:schemeClr>
+                  </a:solidFill>
+                </a:rPr>
+                <a:t>Phison</a:t>
+              </a:r>
+              <a:r>
+                <a:rPr lang="en-US" altLang="zh-TW" sz="1400" dirty="0" smtClean="0">
+                  <a:solidFill>
+                    <a:schemeClr val="tx1">
+                      <a:lumMod val="85000"/>
+                      <a:lumOff val="15000"/>
+                    </a:schemeClr>
+                  </a:solidFill>
+                </a:rPr>
+                <a:t> </a:t>
+              </a:r>
+              <a:r>
+                <a:rPr lang="en-US" altLang="zh-TW" sz="1400" dirty="0" smtClean="0">
+                  <a:solidFill>
+                    <a:schemeClr val="tx1">
+                      <a:lumMod val="85000"/>
+                      <a:lumOff val="15000"/>
+                    </a:schemeClr>
+                  </a:solidFill>
+                </a:rPr>
+                <a:t>Electronics</a:t>
+              </a:r>
+              <a:endParaRPr lang="en-US" altLang="zh-TW" sz="1400" dirty="0">
+                <a:solidFill>
+                  <a:schemeClr val="tx1">
+                    <a:lumMod val="85000"/>
+                    <a:lumOff val="15000"/>
+                  </a:schemeClr>
+                </a:solidFill>
+              </a:endParaRPr>
+            </a:p>
+          </p:txBody>
+        </p:sp>
+        <p:sp>
+          <p:nvSpPr>
+            <p:cNvPr id="25" name="文字方塊 24"/>
+            <p:cNvSpPr txBox="1"/>
+            <p:nvPr/>
+          </p:nvSpPr>
+          <p:spPr>
+            <a:xfrm>
+              <a:off x="775946" y="5650737"/>
+              <a:ext cx="5802504" cy="1200329"/>
+            </a:xfrm>
+            <a:prstGeom prst="rect">
+              <a:avLst/>
+            </a:prstGeom>
+            <a:noFill/>
+          </p:spPr>
+          <p:txBody>
+            <a:bodyPr wrap="square" rtlCol="0">
+              <a:spAutoFit/>
+            </a:bodyPr>
+            <a:lstStyle/>
+            <a:p>
+              <a:pPr marL="285750" indent="-285750" algn="just">
+                <a:buFont typeface="Arial" panose="020B0604020202020204" pitchFamily="34" charset="0"/>
+                <a:buChar char="•"/>
+              </a:pPr>
+              <a:r>
+                <a:rPr lang="en-US" altLang="zh-TW" sz="1200" dirty="0">
+                  <a:solidFill>
+                    <a:schemeClr val="tx1">
+                      <a:lumMod val="85000"/>
+                      <a:lumOff val="15000"/>
+                    </a:schemeClr>
+                  </a:solidFill>
+                </a:rPr>
+                <a:t>UFS underlying IP (</a:t>
+              </a:r>
+              <a:r>
+                <a:rPr lang="en-US" altLang="zh-TW" sz="1200" b="1" dirty="0" err="1">
+                  <a:solidFill>
+                    <a:schemeClr val="tx1">
+                      <a:lumMod val="85000"/>
+                      <a:lumOff val="15000"/>
+                    </a:schemeClr>
+                  </a:solidFill>
+                  <a:hlinkClick r:id="rId3"/>
+                </a:rPr>
+                <a:t>Unipro</a:t>
+              </a:r>
+              <a:r>
+                <a:rPr lang="en-US" altLang="zh-TW" sz="1200" dirty="0">
+                  <a:solidFill>
+                    <a:schemeClr val="tx1">
+                      <a:lumMod val="85000"/>
+                      <a:lumOff val="15000"/>
+                    </a:schemeClr>
+                  </a:solidFill>
+                </a:rPr>
+                <a:t>) design verification</a:t>
+              </a:r>
+            </a:p>
+            <a:p>
+              <a:pPr marL="285750" indent="-285750" algn="just">
+                <a:buFont typeface="Arial" panose="020B0604020202020204" pitchFamily="34" charset="0"/>
+                <a:buChar char="•"/>
+              </a:pPr>
+              <a:r>
+                <a:rPr lang="en-US" altLang="zh-TW" sz="1200" dirty="0">
+                  <a:solidFill>
+                    <a:schemeClr val="tx1">
+                      <a:lumMod val="85000"/>
+                      <a:lumOff val="15000"/>
+                    </a:schemeClr>
+                  </a:solidFill>
+                </a:rPr>
+                <a:t>Develop UVM environment for DUT</a:t>
+              </a:r>
+            </a:p>
+            <a:p>
+              <a:pPr marL="285750" indent="-285750" algn="just">
+                <a:buFont typeface="Arial" panose="020B0604020202020204" pitchFamily="34" charset="0"/>
+                <a:buChar char="•"/>
+              </a:pPr>
+              <a:r>
+                <a:rPr lang="en-US" altLang="zh-TW" sz="1200" dirty="0">
+                  <a:solidFill>
+                    <a:schemeClr val="tx1">
+                      <a:lumMod val="85000"/>
+                      <a:lumOff val="15000"/>
+                    </a:schemeClr>
+                  </a:solidFill>
+                </a:rPr>
+                <a:t>Formal Property Verification (</a:t>
+              </a:r>
+              <a:r>
+                <a:rPr lang="en-US" altLang="zh-TW" sz="1200" b="1" dirty="0">
+                  <a:solidFill>
+                    <a:schemeClr val="tx1">
+                      <a:lumMod val="85000"/>
+                      <a:lumOff val="15000"/>
+                    </a:schemeClr>
+                  </a:solidFill>
+                </a:rPr>
+                <a:t>FPV</a:t>
+              </a:r>
+              <a:r>
+                <a:rPr lang="en-US" altLang="zh-TW" sz="1200" dirty="0">
+                  <a:solidFill>
+                    <a:schemeClr val="tx1">
+                      <a:lumMod val="85000"/>
+                      <a:lumOff val="15000"/>
+                    </a:schemeClr>
+                  </a:solidFill>
+                </a:rPr>
+                <a:t>)</a:t>
+              </a:r>
+            </a:p>
+            <a:p>
+              <a:pPr marL="285750" indent="-285750" algn="just">
+                <a:buFont typeface="Arial" panose="020B0604020202020204" pitchFamily="34" charset="0"/>
+                <a:buChar char="•"/>
+              </a:pPr>
+              <a:r>
+                <a:rPr lang="en-US" altLang="zh-TW" sz="1200" dirty="0">
+                  <a:solidFill>
+                    <a:schemeClr val="tx1">
+                      <a:lumMod val="85000"/>
+                      <a:lumOff val="15000"/>
+                    </a:schemeClr>
+                  </a:solidFill>
+                </a:rPr>
+                <a:t>Design test plans and </a:t>
+              </a:r>
+              <a:r>
+                <a:rPr lang="en-US" altLang="zh-TW" sz="1200" dirty="0" err="1" smtClean="0">
+                  <a:solidFill>
+                    <a:schemeClr val="tx1">
+                      <a:lumMod val="85000"/>
+                      <a:lumOff val="15000"/>
+                    </a:schemeClr>
+                  </a:solidFill>
+                </a:rPr>
+                <a:t>testvectors</a:t>
+              </a:r>
+              <a:endParaRPr lang="en-US" altLang="zh-TW" sz="1200" dirty="0" smtClean="0">
+                <a:solidFill>
+                  <a:schemeClr val="tx1">
+                    <a:lumMod val="85000"/>
+                    <a:lumOff val="15000"/>
+                  </a:schemeClr>
+                </a:solidFill>
+              </a:endParaRPr>
+            </a:p>
+            <a:p>
+              <a:pPr marL="285750" indent="-285750" algn="just">
+                <a:buFont typeface="Arial" panose="020B0604020202020204" pitchFamily="34" charset="0"/>
+                <a:buChar char="•"/>
+              </a:pPr>
+              <a:r>
+                <a:rPr lang="en-US" altLang="zh-TW" sz="1200" dirty="0" smtClean="0">
+                  <a:solidFill>
+                    <a:schemeClr val="tx1">
+                      <a:lumMod val="85000"/>
+                      <a:lumOff val="15000"/>
+                    </a:schemeClr>
+                  </a:solidFill>
+                </a:rPr>
+                <a:t>Discuss </a:t>
+              </a:r>
+              <a:r>
+                <a:rPr lang="en-US" altLang="zh-TW" sz="1200" dirty="0">
+                  <a:solidFill>
+                    <a:schemeClr val="tx1">
+                      <a:lumMod val="85000"/>
+                      <a:lumOff val="15000"/>
+                    </a:schemeClr>
+                  </a:solidFill>
+                </a:rPr>
+                <a:t>and modify test plans with international clients</a:t>
+              </a:r>
+            </a:p>
+            <a:p>
+              <a:pPr marL="285750" indent="-285750" algn="just">
+                <a:buFont typeface="Arial" panose="020B0604020202020204" pitchFamily="34" charset="0"/>
+                <a:buChar char="•"/>
+              </a:pPr>
+              <a:r>
+                <a:rPr lang="en-US" altLang="zh-TW" sz="1200" dirty="0">
+                  <a:solidFill>
+                    <a:schemeClr val="tx1">
+                      <a:lumMod val="85000"/>
+                      <a:lumOff val="15000"/>
+                    </a:schemeClr>
+                  </a:solidFill>
+                </a:rPr>
+                <a:t>Verifying in-house DUTs and collaborating with designers on debugging</a:t>
+              </a:r>
+            </a:p>
+          </p:txBody>
+        </p:sp>
+        <p:sp>
+          <p:nvSpPr>
+            <p:cNvPr id="41" name="文字方塊 40"/>
+            <p:cNvSpPr txBox="1"/>
+            <p:nvPr/>
+          </p:nvSpPr>
+          <p:spPr>
+            <a:xfrm>
+              <a:off x="5182395" y="5358348"/>
+              <a:ext cx="1591451" cy="307777"/>
+            </a:xfrm>
+            <a:prstGeom prst="rect">
+              <a:avLst/>
+            </a:prstGeom>
+            <a:noFill/>
+          </p:spPr>
+          <p:txBody>
+            <a:bodyPr wrap="square" rtlCol="0">
+              <a:spAutoFit/>
+            </a:bodyPr>
+            <a:lstStyle/>
+            <a:p>
+              <a:r>
+                <a:rPr lang="en-US" altLang="zh-TW" sz="1400" dirty="0">
+                  <a:solidFill>
+                    <a:schemeClr val="tx1">
+                      <a:lumMod val="85000"/>
+                      <a:lumOff val="15000"/>
+                    </a:schemeClr>
+                  </a:solidFill>
+                </a:rPr>
+                <a:t>06/2024 </a:t>
+              </a:r>
+              <a:r>
+                <a:rPr lang="en-US" altLang="zh-TW" sz="1400" dirty="0" smtClean="0">
+                  <a:solidFill>
+                    <a:schemeClr val="tx1">
+                      <a:lumMod val="85000"/>
+                      <a:lumOff val="15000"/>
+                    </a:schemeClr>
+                  </a:solidFill>
+                </a:rPr>
+                <a:t>– 08/2025</a:t>
+              </a:r>
+              <a:endParaRPr lang="en-US" altLang="zh-TW" sz="1400" dirty="0">
+                <a:solidFill>
+                  <a:schemeClr val="tx1">
+                    <a:lumMod val="85000"/>
+                    <a:lumOff val="15000"/>
+                  </a:schemeClr>
+                </a:solidFill>
+              </a:endParaRPr>
+            </a:p>
+          </p:txBody>
+        </p:sp>
+      </p:grpSp>
       <p:grpSp>
         <p:nvGrpSpPr>
           <p:cNvPr id="46" name="群組 45"/>
@@ -4303,7 +4470,7 @@
         </p:nvGrpSpPr>
         <p:grpSpPr>
           <a:xfrm>
-            <a:off x="4143054" y="1278164"/>
+            <a:off x="4143054" y="1061593"/>
             <a:ext cx="2292209" cy="253916"/>
             <a:chOff x="4260677" y="532806"/>
             <a:chExt cx="2292209" cy="253916"/>
@@ -4411,7 +4578,7 @@
         </p:nvGrpSpPr>
         <p:grpSpPr>
           <a:xfrm>
-            <a:off x="4143054" y="1642313"/>
+            <a:off x="4143054" y="1425742"/>
             <a:ext cx="2482967" cy="253916"/>
             <a:chOff x="4260677" y="865082"/>
             <a:chExt cx="2482967" cy="253916"/>
@@ -4505,7 +4672,7 @@
         </p:nvGrpSpPr>
         <p:grpSpPr>
           <a:xfrm>
-            <a:off x="541820" y="549868"/>
+            <a:off x="541820" y="333297"/>
             <a:ext cx="2012562" cy="932643"/>
             <a:chOff x="562195" y="232280"/>
             <a:chExt cx="2012562" cy="932643"/>
@@ -4632,7 +4799,7 @@
         </p:nvGrpSpPr>
         <p:grpSpPr>
           <a:xfrm>
-            <a:off x="4143054" y="914016"/>
+            <a:off x="4143054" y="697445"/>
             <a:ext cx="2139925" cy="253916"/>
             <a:chOff x="4260677" y="1654234"/>
             <a:chExt cx="2139925" cy="253916"/>
@@ -4726,7 +4893,7 @@
         </p:nvGrpSpPr>
         <p:grpSpPr>
           <a:xfrm>
-            <a:off x="4143054" y="549868"/>
+            <a:off x="4143054" y="333297"/>
             <a:ext cx="1186137" cy="253916"/>
             <a:chOff x="4260677" y="1351241"/>
             <a:chExt cx="1186137" cy="253916"/>
@@ -4806,6 +4973,363 @@
                 </a:solidFill>
                 <a:latin typeface="微軟正黑體" panose="020B0604030504040204" pitchFamily="34" charset="-120"/>
                 <a:ea typeface="微軟正黑體" panose="020B0604030504040204" pitchFamily="34" charset="-120"/>
+              </a:endParaRPr>
+            </a:p>
+          </p:txBody>
+        </p:sp>
+      </p:grpSp>
+      <p:grpSp>
+        <p:nvGrpSpPr>
+          <p:cNvPr id="2" name="群組 1"/>
+          <p:cNvGrpSpPr/>
+          <p:nvPr/>
+        </p:nvGrpSpPr>
+        <p:grpSpPr>
+          <a:xfrm>
+            <a:off x="760845" y="4216315"/>
+            <a:ext cx="6013001" cy="1109757"/>
+            <a:chOff x="775946" y="4252660"/>
+            <a:chExt cx="6013001" cy="1109757"/>
+          </a:xfrm>
+        </p:grpSpPr>
+        <p:sp>
+          <p:nvSpPr>
+            <p:cNvPr id="47" name="文字方塊 46"/>
+            <p:cNvSpPr txBox="1"/>
+            <p:nvPr/>
+          </p:nvSpPr>
+          <p:spPr>
+            <a:xfrm>
+              <a:off x="775946" y="4252660"/>
+              <a:ext cx="4081988" cy="338554"/>
+            </a:xfrm>
+            <a:prstGeom prst="rect">
+              <a:avLst/>
+            </a:prstGeom>
+            <a:noFill/>
+          </p:spPr>
+          <p:txBody>
+            <a:bodyPr wrap="square" rtlCol="0">
+              <a:spAutoFit/>
+            </a:bodyPr>
+            <a:lstStyle/>
+            <a:p>
+              <a:r>
+                <a:rPr lang="en-US" altLang="zh-TW" sz="1600" b="1" dirty="0" smtClean="0">
+                  <a:solidFill>
+                    <a:schemeClr val="tx1">
+                      <a:lumMod val="85000"/>
+                      <a:lumOff val="15000"/>
+                    </a:schemeClr>
+                  </a:solidFill>
+                </a:rPr>
+                <a:t>Design Verification Engineer</a:t>
+              </a:r>
+              <a:r>
+                <a:rPr lang="en-US" altLang="zh-TW" sz="1400" b="1" dirty="0" smtClean="0">
+                  <a:solidFill>
+                    <a:schemeClr val="tx1">
+                      <a:lumMod val="85000"/>
+                      <a:lumOff val="15000"/>
+                    </a:schemeClr>
+                  </a:solidFill>
+                </a:rPr>
+                <a:t>  </a:t>
+              </a:r>
+              <a:r>
+                <a:rPr lang="en-US" altLang="zh-TW" sz="1400" dirty="0" smtClean="0">
+                  <a:solidFill>
+                    <a:schemeClr val="tx1">
+                      <a:lumMod val="85000"/>
+                      <a:lumOff val="15000"/>
+                    </a:schemeClr>
+                  </a:solidFill>
+                </a:rPr>
+                <a:t>|  </a:t>
+              </a:r>
+              <a:r>
+                <a:rPr lang="en-US" altLang="zh-TW" sz="1400" dirty="0" err="1" smtClean="0">
+                  <a:solidFill>
+                    <a:schemeClr val="tx1">
+                      <a:lumMod val="85000"/>
+                      <a:lumOff val="15000"/>
+                    </a:schemeClr>
+                  </a:solidFill>
+                </a:rPr>
+                <a:t>Realtek</a:t>
+              </a:r>
+              <a:endParaRPr lang="en-US" altLang="zh-TW" sz="1400" dirty="0">
+                <a:solidFill>
+                  <a:schemeClr val="tx1">
+                    <a:lumMod val="85000"/>
+                    <a:lumOff val="15000"/>
+                  </a:schemeClr>
+                </a:solidFill>
+              </a:endParaRPr>
+            </a:p>
+          </p:txBody>
+        </p:sp>
+        <p:sp>
+          <p:nvSpPr>
+            <p:cNvPr id="49" name="文字方塊 48"/>
+            <p:cNvSpPr txBox="1"/>
+            <p:nvPr/>
+          </p:nvSpPr>
+          <p:spPr>
+            <a:xfrm>
+              <a:off x="5197496" y="4268048"/>
+              <a:ext cx="1591451" cy="307777"/>
+            </a:xfrm>
+            <a:prstGeom prst="rect">
+              <a:avLst/>
+            </a:prstGeom>
+            <a:noFill/>
+          </p:spPr>
+          <p:txBody>
+            <a:bodyPr wrap="square" rtlCol="0">
+              <a:spAutoFit/>
+            </a:bodyPr>
+            <a:lstStyle/>
+            <a:p>
+              <a:r>
+                <a:rPr lang="en-US" altLang="zh-TW" sz="1400" dirty="0" smtClean="0">
+                  <a:solidFill>
+                    <a:schemeClr val="tx1">
+                      <a:lumMod val="85000"/>
+                      <a:lumOff val="15000"/>
+                    </a:schemeClr>
+                  </a:solidFill>
+                </a:rPr>
+                <a:t>09/2025 – Present</a:t>
+              </a:r>
+              <a:endParaRPr lang="en-US" altLang="zh-TW" sz="1400" dirty="0">
+                <a:solidFill>
+                  <a:schemeClr val="tx1">
+                    <a:lumMod val="85000"/>
+                    <a:lumOff val="15000"/>
+                  </a:schemeClr>
+                </a:solidFill>
+              </a:endParaRPr>
+            </a:p>
+          </p:txBody>
+        </p:sp>
+        <p:sp>
+          <p:nvSpPr>
+            <p:cNvPr id="50" name="文字方塊 49"/>
+            <p:cNvSpPr txBox="1"/>
+            <p:nvPr/>
+          </p:nvSpPr>
+          <p:spPr>
+            <a:xfrm>
+              <a:off x="775946" y="4531420"/>
+              <a:ext cx="5802504" cy="830997"/>
+            </a:xfrm>
+            <a:prstGeom prst="rect">
+              <a:avLst/>
+            </a:prstGeom>
+            <a:noFill/>
+          </p:spPr>
+          <p:txBody>
+            <a:bodyPr wrap="square" rtlCol="0">
+              <a:spAutoFit/>
+            </a:bodyPr>
+            <a:lstStyle/>
+            <a:p>
+              <a:pPr marL="285750" indent="-285750" algn="just">
+                <a:buFont typeface="Arial" panose="020B0604020202020204" pitchFamily="34" charset="0"/>
+                <a:buChar char="•"/>
+              </a:pPr>
+              <a:r>
+                <a:rPr lang="en-US" altLang="zh-TW" sz="1200" b="1" dirty="0" smtClean="0">
+                  <a:solidFill>
+                    <a:schemeClr val="tx1">
+                      <a:lumMod val="85000"/>
+                      <a:lumOff val="15000"/>
+                    </a:schemeClr>
+                  </a:solidFill>
+                  <a:hlinkClick r:id="rId11"/>
+                </a:rPr>
+                <a:t>CSI-2</a:t>
+              </a:r>
+              <a:r>
+                <a:rPr lang="en-US" altLang="zh-TW" sz="1200" dirty="0" smtClean="0">
+                  <a:solidFill>
+                    <a:schemeClr val="tx1">
+                      <a:lumMod val="85000"/>
+                      <a:lumOff val="15000"/>
+                    </a:schemeClr>
+                  </a:solidFill>
+                </a:rPr>
+                <a:t> </a:t>
+              </a:r>
+              <a:r>
+                <a:rPr lang="en-US" altLang="zh-TW" sz="1200" dirty="0">
+                  <a:solidFill>
+                    <a:schemeClr val="tx1">
+                      <a:lumMod val="85000"/>
+                      <a:lumOff val="15000"/>
+                    </a:schemeClr>
+                  </a:solidFill>
+                </a:rPr>
+                <a:t>design verification</a:t>
+              </a:r>
+            </a:p>
+            <a:p>
+              <a:pPr marL="285750" indent="-285750" algn="just">
+                <a:buFont typeface="Arial" panose="020B0604020202020204" pitchFamily="34" charset="0"/>
+                <a:buChar char="•"/>
+              </a:pPr>
+              <a:r>
+                <a:rPr lang="en-US" altLang="zh-TW" sz="1200" dirty="0">
+                  <a:solidFill>
+                    <a:schemeClr val="tx1">
+                      <a:lumMod val="85000"/>
+                      <a:lumOff val="15000"/>
+                    </a:schemeClr>
+                  </a:solidFill>
+                </a:rPr>
+                <a:t>Develop UVM </a:t>
+              </a:r>
+              <a:r>
+                <a:rPr lang="en-US" altLang="zh-TW" sz="1200" dirty="0" smtClean="0">
+                  <a:solidFill>
+                    <a:schemeClr val="tx1">
+                      <a:lumMod val="85000"/>
+                      <a:lumOff val="15000"/>
+                    </a:schemeClr>
+                  </a:solidFill>
+                </a:rPr>
+                <a:t>environment for </a:t>
+              </a:r>
+              <a:r>
+                <a:rPr lang="en-US" altLang="zh-TW" sz="1200" dirty="0" smtClean="0">
+                  <a:solidFill>
+                    <a:schemeClr val="tx1">
+                      <a:lumMod val="85000"/>
+                      <a:lumOff val="15000"/>
+                    </a:schemeClr>
+                  </a:solidFill>
+                </a:rPr>
+                <a:t>DUT</a:t>
+              </a:r>
+            </a:p>
+            <a:p>
+              <a:pPr marL="285750" indent="-285750" algn="just">
+                <a:buFont typeface="Arial" panose="020B0604020202020204" pitchFamily="34" charset="0"/>
+                <a:buChar char="•"/>
+              </a:pPr>
+              <a:r>
+                <a:rPr lang="en-US" altLang="zh-TW" sz="1200" dirty="0" smtClean="0">
+                  <a:solidFill>
+                    <a:schemeClr val="tx1">
+                      <a:lumMod val="85000"/>
+                      <a:lumOff val="15000"/>
+                    </a:schemeClr>
+                  </a:solidFill>
+                </a:rPr>
+                <a:t>Verifying </a:t>
+              </a:r>
+              <a:r>
+                <a:rPr lang="en-US" altLang="zh-TW" sz="1200" dirty="0">
+                  <a:solidFill>
+                    <a:schemeClr val="tx1">
+                      <a:lumMod val="85000"/>
+                      <a:lumOff val="15000"/>
+                    </a:schemeClr>
+                  </a:solidFill>
+                </a:rPr>
+                <a:t>in-house DUTs and collaborating with designers on </a:t>
+              </a:r>
+              <a:r>
+                <a:rPr lang="en-US" altLang="zh-TW" sz="1200" dirty="0" smtClean="0">
+                  <a:solidFill>
+                    <a:schemeClr val="tx1">
+                      <a:lumMod val="85000"/>
+                      <a:lumOff val="15000"/>
+                    </a:schemeClr>
+                  </a:solidFill>
+                </a:rPr>
+                <a:t>debugging</a:t>
+              </a:r>
+            </a:p>
+            <a:p>
+              <a:pPr marL="285750" indent="-285750" algn="just">
+                <a:buFont typeface="Arial" panose="020B0604020202020204" pitchFamily="34" charset="0"/>
+                <a:buChar char="•"/>
+              </a:pPr>
+              <a:r>
+                <a:rPr lang="en-US" altLang="zh-TW" sz="1200" dirty="0">
+                  <a:solidFill>
+                    <a:schemeClr val="tx1">
+                      <a:lumMod val="85000"/>
+                      <a:lumOff val="15000"/>
+                    </a:schemeClr>
+                  </a:solidFill>
+                </a:rPr>
+                <a:t>Establishing the </a:t>
+              </a:r>
+              <a:r>
+                <a:rPr lang="en-US" altLang="zh-TW" sz="1200" b="1" dirty="0" smtClean="0">
+                  <a:solidFill>
+                    <a:schemeClr val="tx1">
+                      <a:lumMod val="85000"/>
+                      <a:lumOff val="15000"/>
+                    </a:schemeClr>
+                  </a:solidFill>
+                </a:rPr>
+                <a:t>Gate Level Simulation</a:t>
+              </a:r>
+              <a:r>
+                <a:rPr lang="en-US" altLang="zh-TW" sz="1200" dirty="0" smtClean="0">
+                  <a:solidFill>
+                    <a:schemeClr val="tx1">
+                      <a:lumMod val="85000"/>
+                      <a:lumOff val="15000"/>
+                    </a:schemeClr>
+                  </a:solidFill>
+                </a:rPr>
+                <a:t> </a:t>
+              </a:r>
+              <a:r>
+                <a:rPr lang="en-US" altLang="zh-TW" sz="1200" dirty="0">
+                  <a:solidFill>
+                    <a:schemeClr val="tx1">
+                      <a:lumMod val="85000"/>
+                      <a:lumOff val="15000"/>
+                    </a:schemeClr>
+                  </a:solidFill>
+                </a:rPr>
+                <a:t>environment and </a:t>
+              </a:r>
+              <a:r>
+                <a:rPr lang="en-US" altLang="zh-TW" sz="1200" dirty="0" smtClean="0">
+                  <a:solidFill>
+                    <a:schemeClr val="tx1">
+                      <a:lumMod val="85000"/>
+                      <a:lumOff val="15000"/>
+                    </a:schemeClr>
+                  </a:solidFill>
+                </a:rPr>
+                <a:t>provide </a:t>
+              </a:r>
+              <a:r>
+                <a:rPr lang="en-US" altLang="zh-TW" sz="1200" dirty="0">
+                  <a:solidFill>
+                    <a:schemeClr val="tx1">
+                      <a:lumMod val="85000"/>
+                      <a:lumOff val="15000"/>
+                    </a:schemeClr>
+                  </a:solidFill>
+                </a:rPr>
+                <a:t>results for debugging</a:t>
+              </a:r>
+              <a:endParaRPr lang="en-US" altLang="zh-TW" sz="1200" dirty="0">
+                <a:solidFill>
+                  <a:schemeClr val="tx1">
+                    <a:lumMod val="85000"/>
+                    <a:lumOff val="15000"/>
+                  </a:schemeClr>
+                </a:solidFill>
               </a:endParaRPr>
             </a:p>
           </p:txBody>

--- a/public/attaches/PKHuang_Resume.pptx
+++ b/public/attaches/PKHuang_Resume.pptx
@@ -3110,18 +3110,7 @@
                   </a:schemeClr>
                 </a:solidFill>
               </a:rPr>
-              <a:t>≈2 years </a:t>
-            </a:r>
-            <a:r>
-              <a:rPr lang="en-US" altLang="zh-TW" sz="1400" dirty="0">
-                <a:solidFill>
-                  <a:schemeClr val="tx1">
-                    <a:lumMod val="85000"/>
-                    <a:lumOff val="15000"/>
-                  </a:schemeClr>
-                </a:solidFill>
-              </a:rPr>
-              <a:t>in </a:t>
+              <a:t>≈2 years in </a:t>
             </a:r>
             <a:r>
               <a:rPr lang="en-US" altLang="zh-TW" sz="1400" b="1" dirty="0">
@@ -3234,7 +3223,7 @@
         </p:nvSpPr>
         <p:spPr>
           <a:xfrm>
-            <a:off x="760845" y="3888648"/>
+            <a:off x="760845" y="3889927"/>
             <a:ext cx="1844114" cy="338554"/>
           </a:xfrm>
           <a:prstGeom prst="rect">
@@ -3713,7 +3702,7 @@
         </p:nvSpPr>
         <p:spPr>
           <a:xfrm>
-            <a:off x="338718" y="4105482"/>
+            <a:off x="338718" y="4006841"/>
             <a:ext cx="104726" cy="104726"/>
           </a:xfrm>
           <a:prstGeom prst="ellipse">
@@ -3823,7 +3812,7 @@
         </p:nvGrpSpPr>
         <p:grpSpPr>
           <a:xfrm>
-            <a:off x="730643" y="6877306"/>
+            <a:off x="730642" y="6993848"/>
             <a:ext cx="6003970" cy="1323440"/>
             <a:chOff x="730643" y="6862066"/>
             <a:chExt cx="6003970" cy="1323440"/>
@@ -4101,7 +4090,7 @@
         </p:nvGrpSpPr>
         <p:grpSpPr>
           <a:xfrm>
-            <a:off x="760845" y="5358200"/>
+            <a:off x="730642" y="5503369"/>
             <a:ext cx="6013001" cy="1508106"/>
             <a:chOff x="760845" y="5342960"/>
             <a:chExt cx="6013001" cy="1508106"/>
@@ -4182,18 +4171,7 @@
                     </a:schemeClr>
                   </a:solidFill>
                 </a:rPr>
-                <a:t> </a:t>
-              </a:r>
-              <a:r>
-                <a:rPr lang="en-US" altLang="zh-TW" sz="1400" dirty="0" smtClean="0">
-                  <a:solidFill>
-                    <a:schemeClr val="tx1">
-                      <a:lumMod val="85000"/>
-                      <a:lumOff val="15000"/>
-                    </a:schemeClr>
-                  </a:solidFill>
-                </a:rPr>
-                <a:t>Electronics</a:t>
+                <a:t> Electronics</a:t>
               </a:r>
               <a:endParaRPr lang="en-US" altLang="zh-TW" sz="1400" dirty="0">
                 <a:solidFill>
@@ -4986,10 +4964,10 @@
         </p:nvGrpSpPr>
         <p:grpSpPr>
           <a:xfrm>
-            <a:off x="760845" y="4216315"/>
-            <a:ext cx="6013001" cy="1109757"/>
+            <a:off x="730642" y="4223789"/>
+            <a:ext cx="6013001" cy="1294423"/>
             <a:chOff x="775946" y="4252660"/>
-            <a:chExt cx="6013001" cy="1109757"/>
+            <a:chExt cx="6013001" cy="1294423"/>
           </a:xfrm>
         </p:grpSpPr>
         <p:sp>
@@ -5122,7 +5100,7 @@
           <p:spPr>
             <a:xfrm>
               <a:off x="775946" y="4531420"/>
-              <a:ext cx="5802504" cy="830997"/>
+              <a:ext cx="5802504" cy="1015663"/>
             </a:xfrm>
             <a:prstGeom prst="rect">
               <a:avLst/>
@@ -5140,7 +5118,29 @@
                 <a:buChar char="•"/>
               </a:pPr>
               <a:r>
-                <a:rPr lang="en-US" altLang="zh-TW" sz="1200" b="1" dirty="0" smtClean="0">
+                <a:rPr lang="en-US" altLang="zh-TW" sz="1200" dirty="0" smtClean="0">
+                  <a:solidFill>
+                    <a:schemeClr val="tx1">
+                      <a:lumMod val="85000"/>
+                      <a:lumOff val="15000"/>
+                    </a:schemeClr>
+                  </a:solidFill>
+                </a:rPr>
+                <a:t>Solely </a:t>
+              </a:r>
+              <a:r>
+                <a:rPr lang="en-US" altLang="zh-TW" sz="1200" dirty="0">
+                  <a:solidFill>
+                    <a:schemeClr val="tx1">
+                      <a:lumMod val="85000"/>
+                      <a:lumOff val="15000"/>
+                    </a:schemeClr>
+                  </a:solidFill>
+                </a:rPr>
+                <a:t>responsible for the verification of the </a:t>
+              </a:r>
+              <a:r>
+                <a:rPr lang="en-US" altLang="zh-TW" sz="1200" b="1" dirty="0">
                   <a:solidFill>
                     <a:schemeClr val="tx1">
                       <a:lumMod val="85000"/>
@@ -5171,7 +5171,7 @@
                     </a:schemeClr>
                   </a:solidFill>
                 </a:rPr>
-                <a:t>design verification</a:t>
+                <a:t>DUT</a:t>
               </a:r>
             </a:p>
             <a:p>
@@ -5180,6 +5180,17 @@
                 <a:buChar char="•"/>
               </a:pPr>
               <a:r>
+                <a:rPr lang="en-US" altLang="zh-TW" sz="1200" dirty="0" smtClean="0">
+                  <a:solidFill>
+                    <a:schemeClr val="tx1">
+                      <a:lumMod val="85000"/>
+                      <a:lumOff val="15000"/>
+                    </a:schemeClr>
+                  </a:solidFill>
+                </a:rPr>
+                <a:t>Design </a:t>
+              </a:r>
+              <a:r>
                 <a:rPr lang="en-US" altLang="zh-TW" sz="1200" dirty="0">
                   <a:solidFill>
                     <a:schemeClr val="tx1">
@@ -5188,29 +5199,7 @@
                     </a:schemeClr>
                   </a:solidFill>
                 </a:rPr>
-                <a:t>Develop UVM </a:t>
-              </a:r>
-              <a:r>
-                <a:rPr lang="en-US" altLang="zh-TW" sz="1200" dirty="0" smtClean="0">
-                  <a:solidFill>
-                    <a:schemeClr val="tx1">
-                      <a:lumMod val="85000"/>
-                      <a:lumOff val="15000"/>
-                    </a:schemeClr>
-                  </a:solidFill>
-                </a:rPr>
-                <a:t>environment for </a:t>
-              </a:r>
-              <a:r>
-                <a:rPr lang="en-US" altLang="zh-TW" sz="1200" dirty="0" smtClean="0">
-                  <a:solidFill>
-                    <a:schemeClr val="tx1">
-                      <a:lumMod val="85000"/>
-                      <a:lumOff val="15000"/>
-                    </a:schemeClr>
-                  </a:solidFill>
-                </a:rPr>
-                <a:t>DUT</a:t>
+                <a:t>test plan &amp; test patterns</a:t>
               </a:r>
             </a:p>
             <a:p>
@@ -5227,7 +5216,7 @@
                     </a:schemeClr>
                   </a:solidFill>
                 </a:rPr>
-                <a:t>Verifying </a:t>
+                <a:t>Integrated </a:t>
               </a:r>
               <a:r>
                 <a:rPr lang="en-US" altLang="zh-TW" sz="1200" dirty="0">
@@ -5238,18 +5227,7 @@
                     </a:schemeClr>
                   </a:solidFill>
                 </a:rPr>
-                <a:t>in-house DUTs and collaborating with designers on </a:t>
-              </a:r>
-              <a:r>
-                <a:rPr lang="en-US" altLang="zh-TW" sz="1200" dirty="0" smtClean="0">
-                  <a:solidFill>
-                    <a:schemeClr val="tx1">
-                      <a:lumMod val="85000"/>
-                      <a:lumOff val="15000"/>
-                    </a:schemeClr>
-                  </a:solidFill>
-                </a:rPr>
-                <a:t>debugging</a:t>
+                <a:t>VIP into the UVM architecture tailored for the in-house DUT</a:t>
               </a:r>
             </a:p>
             <a:p>
@@ -5258,6 +5236,17 @@
                 <a:buChar char="•"/>
               </a:pPr>
               <a:r>
+                <a:rPr lang="en-US" altLang="zh-TW" sz="1200" dirty="0" smtClean="0">
+                  <a:solidFill>
+                    <a:schemeClr val="tx1">
+                      <a:lumMod val="85000"/>
+                      <a:lumOff val="15000"/>
+                    </a:schemeClr>
+                  </a:solidFill>
+                </a:rPr>
+                <a:t>Collaborate </a:t>
+              </a:r>
+              <a:r>
                 <a:rPr lang="en-US" altLang="zh-TW" sz="1200" dirty="0">
                   <a:solidFill>
                     <a:schemeClr val="tx1">
@@ -5266,7 +5255,24 @@
                     </a:schemeClr>
                   </a:solidFill>
                 </a:rPr>
-                <a:t>Establishing the </a:t>
+                <a:t>with designers on debugging and discussing coverage enhancement</a:t>
+              </a:r>
+            </a:p>
+            <a:p>
+              <a:pPr marL="285750" indent="-285750" algn="just">
+                <a:buFont typeface="Arial" panose="020B0604020202020204" pitchFamily="34" charset="0"/>
+                <a:buChar char="•"/>
+              </a:pPr>
+              <a:r>
+                <a:rPr lang="en-US" altLang="zh-TW" sz="1200" dirty="0" smtClean="0">
+                  <a:solidFill>
+                    <a:schemeClr val="tx1">
+                      <a:lumMod val="85000"/>
+                      <a:lumOff val="15000"/>
+                    </a:schemeClr>
+                  </a:solidFill>
+                </a:rPr>
+                <a:t>Establish </a:t>
               </a:r>
               <a:r>
                 <a:rPr lang="en-US" altLang="zh-TW" sz="1200" b="1" dirty="0" smtClean="0">
@@ -5277,7 +5283,7 @@
                     </a:schemeClr>
                   </a:solidFill>
                 </a:rPr>
-                <a:t>Gate Level Simulation</a:t>
+                <a:t>GLS</a:t>
               </a:r>
               <a:r>
                 <a:rPr lang="en-US" altLang="zh-TW" sz="1200" dirty="0" smtClean="0">
@@ -5299,7 +5305,7 @@
                     </a:schemeClr>
                   </a:solidFill>
                 </a:rPr>
-                <a:t>environment and </a:t>
+                <a:t>environment and provide results to designers for </a:t>
               </a:r>
               <a:r>
                 <a:rPr lang="en-US" altLang="zh-TW" sz="1200" dirty="0" smtClean="0">
@@ -5310,18 +5316,7 @@
                     </a:schemeClr>
                   </a:solidFill>
                 </a:rPr>
-                <a:t>provide </a:t>
-              </a:r>
-              <a:r>
-                <a:rPr lang="en-US" altLang="zh-TW" sz="1200" dirty="0">
-                  <a:solidFill>
-                    <a:schemeClr val="tx1">
-                      <a:lumMod val="85000"/>
-                      <a:lumOff val="15000"/>
-                    </a:schemeClr>
-                  </a:solidFill>
-                </a:rPr>
-                <a:t>results for debugging</a:t>
+                <a:t>debugging</a:t>
               </a:r>
               <a:endParaRPr lang="en-US" altLang="zh-TW" sz="1200" dirty="0">
                 <a:solidFill>
